--- a/Z.pptx
+++ b/Z.pptx
@@ -6,6 +6,7 @@
   </p:sldMasterIdLst>
   <p:sldIdLst>
     <p:sldId id="256" r:id="rId2"/>
+    <p:sldId id="257" r:id="rId3"/>
   </p:sldIdLst>
   <p:sldSz cx="12192000" cy="6858000"/>
   <p:notesSz cx="6858000" cy="9144000"/>
@@ -104,6 +105,11 @@
       </a:defRPr>
     </a:lvl9pPr>
   </p:defaultTextStyle>
+  <p:extLst>
+    <p:ext uri="{EFAFB233-063F-42B5-8137-9DF3F51BA10A}">
+      <p15:sldGuideLst xmlns:p15="http://schemas.microsoft.com/office/powerpoint/2012/main"/>
+    </p:ext>
+  </p:extLst>
 </p:presentation>
 </file>
 
@@ -3375,10 +3381,231 @@
           </a:p>
         </p:txBody>
       </p:sp>
+      <mc:AlternateContent xmlns:mc="http://schemas.openxmlformats.org/markup-compatibility/2006">
+        <mc:Choice xmlns:we="http://schemas.microsoft.com/office/webextensions/webextension/2010/11" xmlns:pca="http://schemas.microsoft.com/office/powerpoint/2013/contentapp" Requires="we pca">
+          <p:graphicFrame>
+            <p:nvGraphicFramePr>
+              <p:cNvPr id="4" name="Add-in 3">
+                <a:extLst>
+                  <a:ext uri="{FF2B5EF4-FFF2-40B4-BE49-F238E27FC236}">
+                    <a16:creationId xmlns:a16="http://schemas.microsoft.com/office/drawing/2014/main" id="{566DF1BD-F6AA-2422-2C91-F6231D49BBA9}"/>
+                  </a:ext>
+                </a:extLst>
+              </p:cNvPr>
+              <p:cNvGraphicFramePr>
+                <a:graphicFrameLocks noGrp="1"/>
+              </p:cNvGraphicFramePr>
+              <p:nvPr/>
+            </p:nvGraphicFramePr>
+            <p:xfrm>
+              <a:off x="1333500" y="571499"/>
+              <a:ext cx="9525000" cy="5715000"/>
+            </p:xfrm>
+            <a:graphic>
+              <a:graphicData uri="http://schemas.microsoft.com/office/webextensions/webextension/2010/11">
+                <we:webextensionref xmlns:we="http://schemas.microsoft.com/office/webextensions/webextension/2010/11" xmlns:r="http://schemas.openxmlformats.org/officeDocument/2006/relationships" r:id="rId2"/>
+              </a:graphicData>
+            </a:graphic>
+          </p:graphicFrame>
+        </mc:Choice>
+        <mc:Fallback>
+          <p:pic>
+            <p:nvPicPr>
+              <p:cNvPr id="4" name="Add-in 3">
+                <a:extLst>
+                  <a:ext uri="{FF2B5EF4-FFF2-40B4-BE49-F238E27FC236}">
+                    <a16:creationId xmlns:a16="http://schemas.microsoft.com/office/drawing/2014/main" id="{566DF1BD-F6AA-2422-2C91-F6231D49BBA9}"/>
+                  </a:ext>
+                </a:extLst>
+              </p:cNvPr>
+              <p:cNvPicPr>
+                <a:picLocks noGrp="1" noRot="1" noChangeAspect="1" noMove="1" noResize="1" noEditPoints="1" noAdjustHandles="1" noChangeArrowheads="1" noChangeShapeType="1"/>
+              </p:cNvPicPr>
+              <p:nvPr/>
+            </p:nvPicPr>
+            <p:blipFill>
+              <a:blip r:embed="rId3"/>
+              <a:stretch>
+                <a:fillRect/>
+              </a:stretch>
+            </p:blipFill>
+            <p:spPr>
+              <a:xfrm>
+                <a:off x="1333500" y="571499"/>
+                <a:ext cx="9525000" cy="5715000"/>
+              </a:xfrm>
+              <a:prstGeom prst="rect">
+                <a:avLst/>
+              </a:prstGeom>
+            </p:spPr>
+          </p:pic>
+        </mc:Fallback>
+      </mc:AlternateContent>
     </p:spTree>
     <p:extLst>
       <p:ext uri="{BB962C8B-B14F-4D97-AF65-F5344CB8AC3E}">
         <p14:creationId xmlns:p14="http://schemas.microsoft.com/office/powerpoint/2010/main" val="3890219727"/>
+      </p:ext>
+    </p:extLst>
+  </p:cSld>
+  <p:clrMapOvr>
+    <a:masterClrMapping/>
+  </p:clrMapOvr>
+</p:sld>
+</file>
+
+<file path=ppt/slides/slide2.xml><?xml version="1.0" encoding="utf-8"?>
+<p:sld xmlns:a="http://schemas.openxmlformats.org/drawingml/2006/main" xmlns:r="http://schemas.openxmlformats.org/officeDocument/2006/relationships" xmlns:p="http://schemas.openxmlformats.org/presentationml/2006/main">
+  <p:cSld>
+    <p:spTree>
+      <p:nvGrpSpPr>
+        <p:cNvPr id="1" name=""/>
+        <p:cNvGrpSpPr/>
+        <p:nvPr/>
+      </p:nvGrpSpPr>
+      <p:grpSpPr>
+        <a:xfrm>
+          <a:off x="0" y="0"/>
+          <a:ext cx="0" cy="0"/>
+          <a:chOff x="0" y="0"/>
+          <a:chExt cx="0" cy="0"/>
+        </a:xfrm>
+      </p:grpSpPr>
+      <p:sp>
+        <p:nvSpPr>
+          <p:cNvPr id="2" name="Title 1">
+            <a:extLst>
+              <a:ext uri="{FF2B5EF4-FFF2-40B4-BE49-F238E27FC236}">
+                <a16:creationId xmlns:a16="http://schemas.microsoft.com/office/drawing/2014/main" id="{3018AB43-ECC3-AB4D-0ED0-B86DD1CE0961}"/>
+              </a:ext>
+            </a:extLst>
+          </p:cNvPr>
+          <p:cNvSpPr>
+            <a:spLocks noGrp="1"/>
+          </p:cNvSpPr>
+          <p:nvPr>
+            <p:ph type="title"/>
+          </p:nvPr>
+        </p:nvSpPr>
+        <p:spPr/>
+        <p:txBody>
+          <a:bodyPr/>
+          <a:lstStyle/>
+          <a:p>
+            <a:endParaRPr lang="en-US"/>
+          </a:p>
+        </p:txBody>
+      </p:sp>
+      <p:sp>
+        <p:nvSpPr>
+          <p:cNvPr id="3" name="Text Placeholder 2">
+            <a:extLst>
+              <a:ext uri="{FF2B5EF4-FFF2-40B4-BE49-F238E27FC236}">
+                <a16:creationId xmlns:a16="http://schemas.microsoft.com/office/drawing/2014/main" id="{B61C2D13-6299-4047-A243-C5F5D2D4B9AF}"/>
+              </a:ext>
+            </a:extLst>
+          </p:cNvPr>
+          <p:cNvSpPr>
+            <a:spLocks noGrp="1"/>
+          </p:cNvSpPr>
+          <p:nvPr>
+            <p:ph type="body" idx="1"/>
+          </p:nvPr>
+        </p:nvSpPr>
+        <p:spPr/>
+        <p:txBody>
+          <a:bodyPr/>
+          <a:lstStyle/>
+          <a:p>
+            <a:r>
+              <a:rPr lang="en-US" dirty="0"/>
+              <a:t>Git </a:t>
+            </a:r>
+          </a:p>
+        </p:txBody>
+      </p:sp>
+      <p:sp>
+        <p:nvSpPr>
+          <p:cNvPr id="4" name="Content Placeholder 3">
+            <a:extLst>
+              <a:ext uri="{FF2B5EF4-FFF2-40B4-BE49-F238E27FC236}">
+                <a16:creationId xmlns:a16="http://schemas.microsoft.com/office/drawing/2014/main" id="{D69A518C-3433-E0DC-DD97-E43CE488261F}"/>
+              </a:ext>
+            </a:extLst>
+          </p:cNvPr>
+          <p:cNvSpPr>
+            <a:spLocks noGrp="1"/>
+          </p:cNvSpPr>
+          <p:nvPr>
+            <p:ph sz="half" idx="2"/>
+          </p:nvPr>
+        </p:nvSpPr>
+        <p:spPr/>
+        <p:txBody>
+          <a:bodyPr/>
+          <a:lstStyle/>
+          <a:p>
+            <a:endParaRPr lang="en-US"/>
+          </a:p>
+        </p:txBody>
+      </p:sp>
+      <p:sp>
+        <p:nvSpPr>
+          <p:cNvPr id="5" name="Text Placeholder 4">
+            <a:extLst>
+              <a:ext uri="{FF2B5EF4-FFF2-40B4-BE49-F238E27FC236}">
+                <a16:creationId xmlns:a16="http://schemas.microsoft.com/office/drawing/2014/main" id="{7FC69818-D4DB-46D9-55AA-DF8EA056782B}"/>
+              </a:ext>
+            </a:extLst>
+          </p:cNvPr>
+          <p:cNvSpPr>
+            <a:spLocks noGrp="1"/>
+          </p:cNvSpPr>
+          <p:nvPr>
+            <p:ph type="body" sz="quarter" idx="3"/>
+          </p:nvPr>
+        </p:nvSpPr>
+        <p:spPr/>
+        <p:txBody>
+          <a:bodyPr/>
+          <a:lstStyle/>
+          <a:p>
+            <a:r>
+              <a:rPr lang="en-US"/>
+              <a:t>Git bash</a:t>
+            </a:r>
+          </a:p>
+        </p:txBody>
+      </p:sp>
+      <p:sp>
+        <p:nvSpPr>
+          <p:cNvPr id="6" name="Content Placeholder 5">
+            <a:extLst>
+              <a:ext uri="{FF2B5EF4-FFF2-40B4-BE49-F238E27FC236}">
+                <a16:creationId xmlns:a16="http://schemas.microsoft.com/office/drawing/2014/main" id="{ED952BB4-A822-A979-8E7A-CC9B8B3D2189}"/>
+              </a:ext>
+            </a:extLst>
+          </p:cNvPr>
+          <p:cNvSpPr>
+            <a:spLocks noGrp="1"/>
+          </p:cNvSpPr>
+          <p:nvPr>
+            <p:ph sz="quarter" idx="4"/>
+          </p:nvPr>
+        </p:nvSpPr>
+        <p:spPr/>
+        <p:txBody>
+          <a:bodyPr/>
+          <a:lstStyle/>
+          <a:p>
+            <a:endParaRPr lang="en-US"/>
+          </a:p>
+        </p:txBody>
+      </p:sp>
+    </p:spTree>
+    <p:extLst>
+      <p:ext uri="{BB962C8B-B14F-4D97-AF65-F5344CB8AC3E}">
+        <p14:creationId xmlns:p14="http://schemas.microsoft.com/office/powerpoint/2010/main" val="3137504597"/>
       </p:ext>
     </p:extLst>
   </p:cSld>
@@ -3701,4 +3928,16 @@
     </a:ext>
   </a:extLst>
 </a:theme>
+</file>
+
+<file path=ppt/webextensions/webextension1.xml><?xml version="1.0" encoding="utf-8"?>
+<we:webextension xmlns:we="http://schemas.microsoft.com/office/webextensions/webextension/2010/11" id="{D7FCF6F7-275E-43E2-B65A-03A845072692}">
+  <we:reference id="wa200003233" version="2.0.0.3" store="en-US" storeType="OMEX"/>
+  <we:alternateReferences>
+    <we:reference id="WA200003233" version="2.0.0.3" store="WA200003233" storeType="OMEX"/>
+  </we:alternateReferences>
+  <we:properties/>
+  <we:bindings/>
+  <we:snapshot xmlns:r="http://schemas.openxmlformats.org/officeDocument/2006/relationships"/>
+</we:webextension>
 </file>
--- a/Z.pptx
+++ b/Z.pptx
@@ -3381,8 +3381,8 @@
           </a:p>
         </p:txBody>
       </p:sp>
-      <mc:AlternateContent xmlns:mc="http://schemas.openxmlformats.org/markup-compatibility/2006">
-        <mc:Choice xmlns:we="http://schemas.microsoft.com/office/webextensions/webextension/2010/11" xmlns:pca="http://schemas.microsoft.com/office/powerpoint/2013/contentapp" Requires="we pca">
+      <mc:AlternateContent xmlns:mc="http://schemas.openxmlformats.org/markup-compatibility/2006" xmlns:we="http://schemas.microsoft.com/office/webextensions/webextension/2010/11" xmlns:pca="http://schemas.microsoft.com/office/powerpoint/2013/contentapp">
+        <mc:Choice Requires="we pca">
           <p:graphicFrame>
             <p:nvGraphicFramePr>
               <p:cNvPr id="4" name="Add-in 3">
@@ -3408,7 +3408,7 @@
             </a:graphic>
           </p:graphicFrame>
         </mc:Choice>
-        <mc:Fallback>
+        <mc:Fallback xmlns="">
           <p:pic>
             <p:nvPicPr>
               <p:cNvPr id="4" name="Add-in 3">
@@ -3545,7 +3545,10 @@
           <a:bodyPr/>
           <a:lstStyle/>
           <a:p>
-            <a:endParaRPr lang="en-US"/>
+            <a:r>
+              <a:rPr lang="en-US"/>
+              <a:t>deferfrvrvfrvwvcws</a:t>
+            </a:r>
           </a:p>
         </p:txBody>
       </p:sp>
